--- a/materials/week6/w6-slides.pptx
+++ b/materials/week6/w6-slides.pptx
@@ -6188,7 +6188,7 @@
           <a:lstStyle/>
           <a:p>
             <a:r>
-              <a:t>ย้ำว่า "ส่ง URL อย่างเดียวครับ ไม่ต้องแนบไฟล์ ผมเปิด GitHub ตรวจเอง" · อธิบายว่าบ่ายนี้จะกดปุ่ม Fork ก๊อปปี้ repo LeaveEasy มาไว้ในบัญชีตัวเอง แล้วทุก commit จะอยู่ที่นั่น · ย้ำ "ผมดูประวัติได้ว่าใครพิมพ์บ้าง คนที่ไม่มี commit ในชื่อตัวเองถือว่าไม่ผ่าน" · บอกว่าภาพหน้า Firebase Console ที่ GitHub มองไม่เห็น ให้เก็บเข้าโฟลเดอร์ docs ในโปรเจกต์แล้ว commit ไปด้วย ใบงานมีวิธีเขียนไว้แล้ว</a:t>
+              <a:t>ย้ำว่า "ส่ง URL อย่างเดียวครับ ไม่ต้องแนบไฟล์ ผมเปิด GitHub ตรวจเอง" · อธิบายว่าบ่ายนี้จะกดปุ่ม Fork ก๊อปปี้ repo LeaveEasy มาไว้ในบัญชีตัวเอง แล้วทุก commit จะอยู่ที่นั่น · ย้ำ "ผมดูประวัติได้ว่าใครพิมพ์บ้าง คนที่ไม่มี commit ในชื่อตัวเองถือว่าไม่ผ่าน"  · ย้ำว่าไม่ต้องเก็บภาพหน้าจอเข้า repo ผมตรวจจากโค้ดกับเว็บของคุณเอง</a:t>
             </a:r>
           </a:p>
         </p:txBody>

--- a/materials/week6/w6-slides.pptx
+++ b/materials/week6/w6-slides.pptx
@@ -6398,7 +6398,7 @@
           <a:lstStyle/>
           <a:p>
             <a:r>
-              <a:t>ย้ำข้อสองให้หนักที่สุด "ขั้น A2 บ่ายนี้จะมีหน้าต่างของ GitHub เด้งขึ้นมาให้ล็อกอิน กด Sign in with your browser แล้ว Authorize ครับ ทำครั้งเดียวใช้ได้ทั้งสี่สัปดาห์ · ห้ามพิมพ์รหัสผ่านหรือโทเคนลงในช่องแชทของ Claude เด็ดขาด ถ้า terminal ขอ username กับ password ให้กด Ctrl C ยกเลิกแล้วเรียก TA" · บอกล่วงหน้าเลยว่า "ตอนนั้นจอ Claude จะนิ่งเหมือนค้างนะครับ มันรอคุณกดอยู่ · ถ้าไม่เห็นหน้าต่าง กด Alt Tab มันไปซ่อนหลังจออื่น · กดเสร็จแล้วครั้งต่อ ๆ ไป Claude ส่งขึ้น GitHub ให้เองเงียบ ๆ คุณยังสั่ง git เป็นภาษาไทยได้เหมือนเดิมทุกอย่าง" · ให้ทุกคนเปิด github.com ล็อกอินค้างไว้ตั้งแต่ตอนพักเที่ยง จะได้ไม่ติดพร้อมกันทั้งห้อง · ย้ำข้อสามว่า "คนที่ไม่มี commit เลยตลอด Module ถือว่าไม่ผ่าน แม้ระบบจะทำงานได้" · อธิบายข้อสาม "screenshot ต้องมาจากเครื่องคุณ ไม่ใช่จอของคนนำ" · วางลิงก์ตารางห้องย่อยในแชทตอนนี้เลย แล้วให้ทุกคนเปิดดูว่าตัวเองอยู่ห้องไหน ก่อนพักเที่ยง จะได้ไม่เสียเวลาหาห้องตอน 13:00 · บอกว่าคิวถามกลางและธนาคารคำตอบสด ลิงก์อยู่ในแชทแล้ว</a:t>
+              <a:t>ย้ำข้อสองให้หนักที่สุด "ขั้น A2 บ่ายนี้จะมีหน้าต่างของ GitHub เด้งขึ้นมาให้ล็อกอิน กด Sign in with your browser แล้ว Authorize ครับ ทำครั้งเดียวใช้ได้ทั้งสี่สัปดาห์ · ห้ามพิมพ์รหัสผ่านหรือโทเคนลงในช่องแชทของ Claude เด็ดขาด ถ้า terminal ขอ username กับ password ให้กด Ctrl C ยกเลิกแล้วเรียก TA" · บอกล่วงหน้าเลยว่า "ตอนนั้นจอ Claude จะนิ่งเหมือนค้างนะครับ มันรอคุณกดอยู่ · ถ้าไม่เห็นหน้าต่าง กด Alt Tab มันไปซ่อนหลังจออื่น · กดเสร็จแล้วครั้งต่อ ๆ ไป Claude ส่งขึ้น GitHub ให้เองเงียบ ๆ คุณยังสั่ง git เป็นภาษาไทยได้เหมือนเดิมทุกอย่าง" · ให้ทุกคนเปิด github.com ล็อกอินค้างไว้ตั้งแต่ตอนพักเที่ยง จะได้ไม่ติดพร้อมกันทั้งห้อง · ย้ำข้อสามว่า "คนที่ไม่มี commit เลยตลอด Module ถือว่าไม่ผ่าน แม้ระบบจะทำงานได้" · อธิบายข้อสาม "ผ่าน Checkpoint แล้วพิมพ์บอกในแชทจากเครื่องคุณเอง ไม่ใช่รอคนนำจอบอกแทน" · วางลิงก์ตารางห้องย่อยในแชทตอนนี้เลย แล้วให้ทุกคนเปิดดูว่าตัวเองอยู่ห้องไหน ก่อนพักเที่ยง จะได้ไม่เสียเวลาหาห้องตอน 13:00 · บอกว่าคิวถามกลางและธนาคารคำตอบสด ลิงก์อยู่ในแชทแล้ว</a:t>
             </a:r>
           </a:p>
         </p:txBody>
@@ -34165,7 +34165,7 @@
                 <a:ea typeface="Leelawadee UI"/>
                 <a:cs typeface="Leelawadee UI"/>
               </a:rPr>
-              <a:t>• 🚦 พิมพ์ 🟢 🟡 🔴 บอกสถานะตัวเองในแชทเสมอ · 📸 โพสต์ screenshot ทุก Checkpoint</a:t>
+              <a:t>• 🚦 พิมพ์ 🟢 🟡 🔴 บอกสถานะตัวเองในแชทเสมอ · ผ่าน Checkpoint แล้วพิมพ์บอก</a:t>
             </a:r>
           </a:p>
         </p:txBody>
